--- a/ppt/X25180754_wildfire-forest-monitoring.pptx
+++ b/ppt/X25180754_wildfire-forest-monitoring.pptx
@@ -3101,87 +3101,8 @@
         </p:nvSpPr>
         <p:spPr>
           <a:xfrm>
-            <a:off x="731520" y="1965960"/>
-            <a:ext cx="10725912" cy="27432"/>
-          </a:xfrm>
-          <a:prstGeom prst="rect">
-            <a:avLst/>
-          </a:prstGeom>
-          <a:solidFill>
-            <a:srgbClr val="232A26"/>
-          </a:solidFill>
-          <a:ln>
-            <a:noFill/>
-          </a:ln>
-          <a:effectLst/>
-        </p:spPr>
-        <p:style>
-          <a:lnRef idx="1">
-            <a:schemeClr val="accent1"/>
-          </a:lnRef>
-          <a:fillRef idx="3">
-            <a:schemeClr val="accent1"/>
-          </a:fillRef>
-          <a:effectRef idx="2">
-            <a:schemeClr val="accent1"/>
-          </a:effectRef>
-          <a:fontRef idx="minor">
-            <a:schemeClr val="lt1"/>
-          </a:fontRef>
-        </p:style>
-        <p:txBody>
-          <a:bodyPr rtlCol="0" anchor="ctr"/>
-          <a:lstStyle/>
-          <a:p>
-            <a:pPr algn="ctr"/>
-          </a:p>
-        </p:txBody>
-      </p:sp>
-      <p:sp>
-        <p:nvSpPr>
-          <p:cNvPr id="3" name="TextBox 2"/>
-          <p:cNvSpPr txBox="1"/>
-          <p:nvPr/>
-        </p:nvSpPr>
-        <p:spPr>
-          <a:xfrm>
-            <a:off x="731520" y="2148840"/>
-            <a:ext cx="10698480" cy="1371600"/>
-          </a:xfrm>
-          <a:prstGeom prst="rect">
-            <a:avLst/>
-          </a:prstGeom>
-          <a:noFill/>
-        </p:spPr>
-        <p:txBody>
-          <a:bodyPr wrap="square" anchor="t">
-            <a:spAutoFit/>
-          </a:bodyPr>
-          <a:lstStyle/>
-          <a:p>
-            <a:pPr algn="l"/>
-            <a:r>
-              <a:rPr sz="4000" b="1">
-                <a:solidFill>
-                  <a:srgbClr val="B23A26"/>
-                </a:solidFill>
-                <a:latin typeface="Book Antiqua"/>
-              </a:rPr>
-              <a:t>Wildfire Forest Monitoring</a:t>
-            </a:r>
-          </a:p>
-        </p:txBody>
-      </p:sp>
-      <p:sp>
-        <p:nvSpPr>
-          <p:cNvPr id="4" name="Rectangle 3"/>
-          <p:cNvSpPr/>
-          <p:nvPr/>
-        </p:nvSpPr>
-        <p:spPr>
-          <a:xfrm>
-            <a:off x="731520" y="3429000"/>
-            <a:ext cx="10725912" cy="50292"/>
+            <a:off x="-91440" y="-91440"/>
+            <a:ext cx="12435840" cy="7040880"/>
           </a:xfrm>
           <a:prstGeom prst="rect">
             <a:avLst/>
@@ -3218,14 +3139,14 @@
       </p:sp>
       <p:sp>
         <p:nvSpPr>
-          <p:cNvPr id="5" name="TextBox 4"/>
+          <p:cNvPr id="3" name="TextBox 2"/>
           <p:cNvSpPr txBox="1"/>
           <p:nvPr/>
         </p:nvSpPr>
         <p:spPr>
           <a:xfrm>
-            <a:off x="731520" y="3657600"/>
-            <a:ext cx="10698480" cy="2011680"/>
+            <a:off x="5852160" y="91440"/>
+            <a:ext cx="6583680" cy="4572000"/>
           </a:xfrm>
           <a:prstGeom prst="rect">
             <a:avLst/>
@@ -3238,35 +3159,184 @@
           </a:bodyPr>
           <a:lstStyle/>
           <a:p>
+            <a:pPr algn="r"/>
+            <a:r>
+              <a:rPr sz="34000" b="1" i="0">
+                <a:solidFill>
+                  <a:srgbClr val="BC5544"/>
+                </a:solidFill>
+                <a:latin typeface="Book Antiqua"/>
+              </a:rPr>
+              <a:t>WF</a:t>
+            </a:r>
+          </a:p>
+        </p:txBody>
+      </p:sp>
+      <p:sp>
+        <p:nvSpPr>
+          <p:cNvPr id="4" name="Rectangle 3"/>
+          <p:cNvSpPr/>
+          <p:nvPr/>
+        </p:nvSpPr>
+        <p:spPr>
+          <a:xfrm>
+            <a:off x="822960" y="2148840"/>
+            <a:ext cx="1554480" cy="82296"/>
+          </a:xfrm>
+          <a:prstGeom prst="rect">
+            <a:avLst/>
+          </a:prstGeom>
+          <a:solidFill>
+            <a:srgbClr val="FFFFFF"/>
+          </a:solidFill>
+          <a:ln>
+            <a:noFill/>
+          </a:ln>
+          <a:effectLst/>
+        </p:spPr>
+        <p:style>
+          <a:lnRef idx="1">
+            <a:schemeClr val="accent1"/>
+          </a:lnRef>
+          <a:fillRef idx="3">
+            <a:schemeClr val="accent1"/>
+          </a:fillRef>
+          <a:effectRef idx="2">
+            <a:schemeClr val="accent1"/>
+          </a:effectRef>
+          <a:fontRef idx="minor">
+            <a:schemeClr val="lt1"/>
+          </a:fontRef>
+        </p:style>
+        <p:txBody>
+          <a:bodyPr rtlCol="0" anchor="ctr"/>
+          <a:lstStyle/>
+          <a:p>
+            <a:pPr algn="ctr"/>
+          </a:p>
+        </p:txBody>
+      </p:sp>
+      <p:sp>
+        <p:nvSpPr>
+          <p:cNvPr id="5" name="TextBox 4"/>
+          <p:cNvSpPr txBox="1"/>
+          <p:nvPr/>
+        </p:nvSpPr>
+        <p:spPr>
+          <a:xfrm>
+            <a:off x="777240" y="2377440"/>
+            <a:ext cx="7498079" cy="2103120"/>
+          </a:xfrm>
+          <a:prstGeom prst="rect">
+            <a:avLst/>
+          </a:prstGeom>
+          <a:noFill/>
+        </p:spPr>
+        <p:txBody>
+          <a:bodyPr wrap="square" anchor="t">
+            <a:spAutoFit/>
+          </a:bodyPr>
+          <a:lstStyle/>
+          <a:p>
             <a:pPr algn="l"/>
             <a:r>
-              <a:rPr sz="1800" b="0">
-                <a:solidFill>
-                  <a:srgbClr val="5C655F"/>
+              <a:rPr sz="4200" b="1" i="0">
+                <a:solidFill>
+                  <a:srgbClr val="FFFFFF"/>
+                </a:solidFill>
+                <a:latin typeface="Book Antiqua"/>
+              </a:rPr>
+              <a:t>Wildfire Forest Monitoring</a:t>
+            </a:r>
+          </a:p>
+        </p:txBody>
+      </p:sp>
+      <p:sp>
+        <p:nvSpPr>
+          <p:cNvPr id="6" name="TextBox 5"/>
+          <p:cNvSpPr txBox="1"/>
+          <p:nvPr/>
+        </p:nvSpPr>
+        <p:spPr>
+          <a:xfrm>
+            <a:off x="822960" y="4160520"/>
+            <a:ext cx="7315200" cy="640080"/>
+          </a:xfrm>
+          <a:prstGeom prst="rect">
+            <a:avLst/>
+          </a:prstGeom>
+          <a:noFill/>
+        </p:spPr>
+        <p:txBody>
+          <a:bodyPr wrap="square" anchor="t">
+            <a:spAutoFit/>
+          </a:bodyPr>
+          <a:lstStyle/>
+          <a:p>
+            <a:pPr algn="l"/>
+            <a:r>
+              <a:rPr sz="1700" b="0" i="1">
+                <a:solidFill>
+                  <a:srgbClr val="EED3CF"/>
                 </a:solidFill>
                 <a:latin typeface="Cambria"/>
               </a:rPr>
               <a:t>Real-time fire-risk telemetry from remote ranger stations, forest edge to cloud</a:t>
             </a:r>
           </a:p>
+        </p:txBody>
+      </p:sp>
+      <p:sp>
+        <p:nvSpPr>
+          <p:cNvPr id="7" name="TextBox 6"/>
+          <p:cNvSpPr txBox="1"/>
+          <p:nvPr/>
+        </p:nvSpPr>
+        <p:spPr>
+          <a:xfrm>
+            <a:off x="822960" y="4983480"/>
+            <a:ext cx="7863840" cy="1371600"/>
+          </a:xfrm>
+          <a:prstGeom prst="rect">
+            <a:avLst/>
+          </a:prstGeom>
+          <a:noFill/>
+        </p:spPr>
+        <p:txBody>
+          <a:bodyPr wrap="square" anchor="t">
+            <a:spAutoFit/>
+          </a:bodyPr>
+          <a:lstStyle/>
           <a:p>
             <a:pPr algn="l"/>
             <a:r>
-              <a:rPr sz="1600" b="1">
-                <a:solidFill>
-                  <a:srgbClr val="232A26"/>
+              <a:rPr sz="1700" b="1" i="0">
+                <a:solidFill>
+                  <a:srgbClr val="FFFFFF"/>
                 </a:solidFill>
                 <a:latin typeface="Cambria"/>
               </a:rPr>
-              <a:t>Deekonda Rakshan    Student ID X25180754</a:t>
+              <a:t>Deekonda Rakshan</a:t>
             </a:r>
           </a:p>
           <a:p>
             <a:pPr algn="l"/>
             <a:r>
-              <a:rPr sz="1300" b="0">
-                <a:solidFill>
-                  <a:srgbClr val="5C655F"/>
+              <a:rPr sz="1300" b="0" i="0">
+                <a:solidFill>
+                  <a:srgbClr val="E6BFB9"/>
+                </a:solidFill>
+                <a:latin typeface="Cambria"/>
+              </a:rPr>
+              <a:t>Student ID X25180754</a:t>
+            </a:r>
+          </a:p>
+          <a:p>
+            <a:pPr algn="l"/>
+            <a:r>
+              <a:rPr sz="1250" b="0" i="0">
+                <a:solidFill>
+                  <a:srgbClr val="E6BFB9"/>
                 </a:solidFill>
                 <a:latin typeface="Cambria"/>
               </a:rPr>
@@ -3276,9 +3346,9 @@
           <a:p>
             <a:pPr algn="l"/>
             <a:r>
-              <a:rPr sz="1300" b="0">
-                <a:solidFill>
-                  <a:srgbClr val="5C655F"/>
+              <a:rPr sz="1250" b="0" i="0">
+                <a:solidFill>
+                  <a:srgbClr val="E6BFB9"/>
                 </a:solidFill>
                 <a:latin typeface="Cambria"/>
               </a:rPr>

--- a/ppt/X25180754_wildfire-forest-monitoring.pptx
+++ b/ppt/X25180754_wildfire-forest-monitoring.pptx
@@ -3139,48 +3139,13 @@
       </p:sp>
       <p:sp>
         <p:nvSpPr>
-          <p:cNvPr id="3" name="TextBox 2"/>
-          <p:cNvSpPr txBox="1"/>
+          <p:cNvPr id="3" name="Rectangle 2"/>
+          <p:cNvSpPr/>
           <p:nvPr/>
         </p:nvSpPr>
         <p:spPr>
           <a:xfrm>
-            <a:off x="5852160" y="91440"/>
-            <a:ext cx="6583680" cy="4572000"/>
-          </a:xfrm>
-          <a:prstGeom prst="rect">
-            <a:avLst/>
-          </a:prstGeom>
-          <a:noFill/>
-        </p:spPr>
-        <p:txBody>
-          <a:bodyPr wrap="square" anchor="t">
-            <a:spAutoFit/>
-          </a:bodyPr>
-          <a:lstStyle/>
-          <a:p>
-            <a:pPr algn="r"/>
-            <a:r>
-              <a:rPr sz="34000" b="1" i="0">
-                <a:solidFill>
-                  <a:srgbClr val="BC5544"/>
-                </a:solidFill>
-                <a:latin typeface="Book Antiqua"/>
-              </a:rPr>
-              <a:t>WF</a:t>
-            </a:r>
-          </a:p>
-        </p:txBody>
-      </p:sp>
-      <p:sp>
-        <p:nvSpPr>
-          <p:cNvPr id="4" name="Rectangle 3"/>
-          <p:cNvSpPr/>
-          <p:nvPr/>
-        </p:nvSpPr>
-        <p:spPr>
-          <a:xfrm>
-            <a:off x="822960" y="2148840"/>
+            <a:off x="9811512" y="1965960"/>
             <a:ext cx="1554480" cy="82296"/>
           </a:xfrm>
           <a:prstGeom prst="rect">
@@ -3218,14 +3183,14 @@
       </p:sp>
       <p:sp>
         <p:nvSpPr>
-          <p:cNvPr id="5" name="TextBox 4"/>
+          <p:cNvPr id="4" name="TextBox 3"/>
           <p:cNvSpPr txBox="1"/>
           <p:nvPr/>
         </p:nvSpPr>
         <p:spPr>
           <a:xfrm>
-            <a:off x="777240" y="2377440"/>
-            <a:ext cx="7498079" cy="2103120"/>
+            <a:off x="3200400" y="2194560"/>
+            <a:ext cx="8165592" cy="2103120"/>
           </a:xfrm>
           <a:prstGeom prst="rect">
             <a:avLst/>
@@ -3238,7 +3203,7 @@
           </a:bodyPr>
           <a:lstStyle/>
           <a:p>
-            <a:pPr algn="l"/>
+            <a:pPr algn="r"/>
             <a:r>
               <a:rPr sz="4200" b="1" i="0">
                 <a:solidFill>
@@ -3253,14 +3218,14 @@
       </p:sp>
       <p:sp>
         <p:nvSpPr>
-          <p:cNvPr id="6" name="TextBox 5"/>
+          <p:cNvPr id="5" name="TextBox 4"/>
           <p:cNvSpPr txBox="1"/>
           <p:nvPr/>
         </p:nvSpPr>
         <p:spPr>
           <a:xfrm>
-            <a:off x="822960" y="4160520"/>
-            <a:ext cx="7315200" cy="640080"/>
+            <a:off x="4023360" y="4069080"/>
+            <a:ext cx="7342631" cy="640080"/>
           </a:xfrm>
           <a:prstGeom prst="rect">
             <a:avLst/>
@@ -3273,7 +3238,7 @@
           </a:bodyPr>
           <a:lstStyle/>
           <a:p>
-            <a:pPr algn="l"/>
+            <a:pPr algn="r"/>
             <a:r>
               <a:rPr sz="1700" b="0" i="1">
                 <a:solidFill>
@@ -3288,14 +3253,14 @@
       </p:sp>
       <p:sp>
         <p:nvSpPr>
-          <p:cNvPr id="7" name="TextBox 6"/>
+          <p:cNvPr id="6" name="TextBox 5"/>
           <p:cNvSpPr txBox="1"/>
           <p:nvPr/>
         </p:nvSpPr>
         <p:spPr>
           <a:xfrm>
-            <a:off x="822960" y="4983480"/>
-            <a:ext cx="7863840" cy="1371600"/>
+            <a:off x="3566160" y="4892040"/>
+            <a:ext cx="7799831" cy="1371600"/>
           </a:xfrm>
           <a:prstGeom prst="rect">
             <a:avLst/>
@@ -3308,7 +3273,7 @@
           </a:bodyPr>
           <a:lstStyle/>
           <a:p>
-            <a:pPr algn="l"/>
+            <a:pPr algn="r"/>
             <a:r>
               <a:rPr sz="1700" b="1" i="0">
                 <a:solidFill>
@@ -3320,7 +3285,7 @@
             </a:r>
           </a:p>
           <a:p>
-            <a:pPr algn="l"/>
+            <a:pPr algn="r"/>
             <a:r>
               <a:rPr sz="1300" b="0" i="0">
                 <a:solidFill>
@@ -3332,7 +3297,7 @@
             </a:r>
           </a:p>
           <a:p>
-            <a:pPr algn="l"/>
+            <a:pPr algn="r"/>
             <a:r>
               <a:rPr sz="1250" b="0" i="0">
                 <a:solidFill>
@@ -3344,7 +3309,7 @@
             </a:r>
           </a:p>
           <a:p>
-            <a:pPr algn="l"/>
+            <a:pPr algn="r"/>
             <a:r>
               <a:rPr sz="1250" b="0" i="0">
                 <a:solidFill>

--- a/ppt/X25180754_wildfire-forest-monitoring.pptx
+++ b/ppt/X25180754_wildfire-forest-monitoring.pptx
@@ -3342,18 +3342,64 @@
       <p:grpSpPr/>
       <p:sp>
         <p:nvSpPr>
-          <p:cNvPr id="2" name="Title 1"/>
-          <p:cNvSpPr>
-            <a:spLocks noGrp="1"/>
-          </p:cNvSpPr>
-          <p:nvPr>
-            <p:ph type="title"/>
-          </p:nvPr>
+          <p:cNvPr id="5" name="Rounded Rectangle 4"/>
+          <p:cNvSpPr/>
+          <p:nvPr/>
         </p:nvSpPr>
         <p:spPr>
           <a:xfrm>
-            <a:off x="640080" y="411480"/>
-            <a:ext cx="10972800" cy="822960"/>
+            <a:off x="548640" y="1463040"/>
+            <a:ext cx="11091672" cy="5029200"/>
+          </a:xfrm>
+          <a:prstGeom prst="roundRect">
+            <a:avLst/>
+          </a:prstGeom>
+          <a:solidFill>
+            <a:srgbClr val="F5E7E4"/>
+          </a:solidFill>
+          <a:ln w="12700">
+            <a:solidFill>
+              <a:srgbClr val="B23A26"/>
+            </a:solidFill>
+          </a:ln>
+          <a:effectLst/>
+        </p:spPr>
+        <p:style>
+          <a:lnRef idx="1">
+            <a:schemeClr val="accent1"/>
+          </a:lnRef>
+          <a:fillRef idx="3">
+            <a:schemeClr val="accent1"/>
+          </a:fillRef>
+          <a:effectRef idx="2">
+            <a:schemeClr val="accent1"/>
+          </a:effectRef>
+          <a:fontRef idx="minor">
+            <a:schemeClr val="lt1"/>
+          </a:fontRef>
+        </p:style>
+        <p:txBody>
+          <a:bodyPr rtlCol="0" anchor="ctr"/>
+          <a:lstStyle/>
+          <a:p>
+            <a:pPr algn="ctr"/>
+          </a:p>
+        </p:txBody>
+      </p:sp>
+      <p:sp>
+        <p:nvSpPr>
+          <p:cNvPr id="2" name="Title 1"/>
+          <p:cNvSpPr>
+            <a:spLocks noGrp="1"/>
+          </p:cNvSpPr>
+          <p:nvPr>
+            <p:ph type="title"/>
+          </p:nvPr>
+        </p:nvSpPr>
+        <p:spPr>
+          <a:xfrm>
+            <a:off x="640080" y="384048"/>
+            <a:ext cx="10972800" cy="868680"/>
           </a:xfrm>
         </p:spPr>
         <p:txBody>
@@ -3364,7 +3410,7 @@
             <a:r>
               <a:rPr b="1" sz="2700">
                 <a:solidFill>
-                  <a:srgbClr val="232A26"/>
+                  <a:srgbClr val="B23A26"/>
                 </a:solidFill>
                 <a:latin typeface="Book Antiqua"/>
               </a:rPr>
@@ -3385,8 +3431,8 @@
         </p:nvSpPr>
         <p:spPr>
           <a:xfrm>
-            <a:off x="658368" y="1463040"/>
-            <a:ext cx="10972800" cy="4663440"/>
+            <a:off x="914400" y="1737360"/>
+            <a:ext cx="10424160" cy="4480560"/>
           </a:xfrm>
         </p:spPr>
         <p:txBody>
@@ -3532,8 +3578,8 @@
         </p:nvSpPr>
         <p:spPr>
           <a:xfrm>
-            <a:off x="658368" y="1207008"/>
-            <a:ext cx="10881360" cy="45720"/>
+            <a:off x="658368" y="1261872"/>
+            <a:ext cx="3108960" cy="36576"/>
           </a:xfrm>
           <a:prstGeom prst="rect">
             <a:avLst/>
@@ -3568,16 +3614,248 @@
           </a:p>
         </p:txBody>
       </p:sp>
-      <p:sp>
-        <p:nvSpPr>
-          <p:cNvPr id="5" name="Rectangle 4"/>
+    </p:spTree>
+  </p:cSld>
+  <p:clrMapOvr>
+    <a:masterClrMapping/>
+  </p:clrMapOvr>
+</p:sld>
+</file>
+
+<file path=ppt/slides/slide3.xml><?xml version="1.0" encoding="utf-8"?>
+<p:sld xmlns:a="http://schemas.openxmlformats.org/drawingml/2006/main" xmlns:p="http://schemas.openxmlformats.org/presentationml/2006/main" xmlns:r="http://schemas.openxmlformats.org/officeDocument/2006/relationships">
+  <p:cSld>
+    <p:spTree>
+      <p:nvGrpSpPr>
+        <p:cNvPr id="1" name=""/>
+        <p:cNvGrpSpPr/>
+        <p:nvPr/>
+      </p:nvGrpSpPr>
+      <p:grpSpPr/>
+      <p:sp>
+        <p:nvSpPr>
+          <p:cNvPr id="5" name="Rounded Rectangle 4"/>
           <p:cNvSpPr/>
           <p:nvPr/>
         </p:nvSpPr>
         <p:spPr>
           <a:xfrm>
-            <a:off x="658368" y="6355080"/>
-            <a:ext cx="2743200" cy="36576"/>
+            <a:off x="548640" y="1463040"/>
+            <a:ext cx="11091672" cy="5029200"/>
+          </a:xfrm>
+          <a:prstGeom prst="roundRect">
+            <a:avLst/>
+          </a:prstGeom>
+          <a:solidFill>
+            <a:srgbClr val="F5E7E4"/>
+          </a:solidFill>
+          <a:ln w="12700">
+            <a:solidFill>
+              <a:srgbClr val="B23A26"/>
+            </a:solidFill>
+          </a:ln>
+          <a:effectLst/>
+        </p:spPr>
+        <p:style>
+          <a:lnRef idx="1">
+            <a:schemeClr val="accent1"/>
+          </a:lnRef>
+          <a:fillRef idx="3">
+            <a:schemeClr val="accent1"/>
+          </a:fillRef>
+          <a:effectRef idx="2">
+            <a:schemeClr val="accent1"/>
+          </a:effectRef>
+          <a:fontRef idx="minor">
+            <a:schemeClr val="lt1"/>
+          </a:fontRef>
+        </p:style>
+        <p:txBody>
+          <a:bodyPr rtlCol="0" anchor="ctr"/>
+          <a:lstStyle/>
+          <a:p>
+            <a:pPr algn="ctr"/>
+          </a:p>
+        </p:txBody>
+      </p:sp>
+      <p:sp>
+        <p:nvSpPr>
+          <p:cNvPr id="2" name="Title 1"/>
+          <p:cNvSpPr>
+            <a:spLocks noGrp="1"/>
+          </p:cNvSpPr>
+          <p:nvPr>
+            <p:ph type="title"/>
+          </p:nvPr>
+        </p:nvSpPr>
+        <p:spPr>
+          <a:xfrm>
+            <a:off x="640080" y="384048"/>
+            <a:ext cx="10972800" cy="868680"/>
+          </a:xfrm>
+        </p:spPr>
+        <p:txBody>
+          <a:bodyPr wrap="square" anchor="t"/>
+          <a:lstStyle/>
+          <a:p>
+            <a:pPr algn="l"/>
+            <a:r>
+              <a:rPr b="1" sz="2700">
+                <a:solidFill>
+                  <a:srgbClr val="B23A26"/>
+                </a:solidFill>
+                <a:latin typeface="Book Antiqua"/>
+              </a:rPr>
+              <a:t>How it works: forest edge to cloud</a:t>
+            </a:r>
+          </a:p>
+        </p:txBody>
+      </p:sp>
+      <p:sp>
+        <p:nvSpPr>
+          <p:cNvPr id="3" name="Content Placeholder 2"/>
+          <p:cNvSpPr>
+            <a:spLocks noGrp="1"/>
+          </p:cNvSpPr>
+          <p:nvPr>
+            <p:ph idx="1"/>
+          </p:nvPr>
+        </p:nvSpPr>
+        <p:spPr>
+          <a:xfrm>
+            <a:off x="914400" y="1737360"/>
+            <a:ext cx="10424160" cy="4480560"/>
+          </a:xfrm>
+        </p:spPr>
+        <p:txBody>
+          <a:bodyPr wrap="square">
+            <a:normAutofit/>
+          </a:bodyPr>
+          <a:lstStyle/>
+          <a:p>
+            <a:pPr>
+              <a:spcAft>
+                <a:spcPts val="900"/>
+              </a:spcAft>
+            </a:pPr>
+            <a:r>
+              <a:rPr sz="1700" b="0">
+                <a:solidFill>
+                  <a:srgbClr val="232A26"/>
+                </a:solidFill>
+                <a:latin typeface="Cambria"/>
+              </a:rPr>
+              <a:t>Field sensors: ten containerised sensors stream temperature, humidity, smoke, wind and soil moisture from two stations.</a:t>
+            </a:r>
+          </a:p>
+          <a:p>
+            <a:pPr>
+              <a:spcAft>
+                <a:spcPts val="900"/>
+              </a:spcAft>
+            </a:pPr>
+            <a:r>
+              <a:rPr sz="1700" b="0">
+                <a:solidFill>
+                  <a:srgbClr val="232A26"/>
+                </a:solidFill>
+                <a:latin typeface="Cambria"/>
+              </a:rPr>
+              <a:t>Fog node, edge gateway: buffers readings, aggregates each time window, and raises fire alerts right at the edge.</a:t>
+            </a:r>
+          </a:p>
+          <a:p>
+            <a:pPr>
+              <a:spcAft>
+                <a:spcPts val="900"/>
+              </a:spcAft>
+            </a:pPr>
+            <a:r>
+              <a:rPr sz="1700" b="0">
+                <a:solidFill>
+                  <a:srgbClr val="232A26"/>
+                </a:solidFill>
+                <a:latin typeface="Cambria"/>
+              </a:rPr>
+              <a:t>Message queue: Amazon SQS receives each window's aggregates in batched sends.</a:t>
+            </a:r>
+          </a:p>
+          <a:p>
+            <a:pPr>
+              <a:spcAft>
+                <a:spcPts val="900"/>
+              </a:spcAft>
+            </a:pPr>
+            <a:r>
+              <a:rPr sz="1700" b="0">
+                <a:solidFill>
+                  <a:srgbClr val="232A26"/>
+                </a:solidFill>
+                <a:latin typeface="Cambria"/>
+              </a:rPr>
+              <a:t>Serverless ingest: an AWS Lambda function consumes the queue and transforms every record.</a:t>
+            </a:r>
+          </a:p>
+          <a:p>
+            <a:pPr>
+              <a:spcAft>
+                <a:spcPts val="900"/>
+              </a:spcAft>
+            </a:pPr>
+            <a:r>
+              <a:rPr sz="1700" b="0">
+                <a:solidFill>
+                  <a:srgbClr val="232A26"/>
+                </a:solidFill>
+                <a:latin typeface="Cambria"/>
+              </a:rPr>
+              <a:t>Cloud store: Amazon DynamoDB keeps the full history of aggregate windows.</a:t>
+            </a:r>
+          </a:p>
+          <a:p>
+            <a:pPr>
+              <a:spcAft>
+                <a:spcPts val="900"/>
+              </a:spcAft>
+            </a:pPr>
+            <a:r>
+              <a:rPr sz="1700" b="0">
+                <a:solidFill>
+                  <a:srgbClr val="232A26"/>
+                </a:solidFill>
+                <a:latin typeface="Cambria"/>
+              </a:rPr>
+              <a:t>Live dashboard: Amazon API Gateway serves the data; the page itself is hosted on Amazon S3, with a 0 to 4 fire-risk dial per station.</a:t>
+            </a:r>
+          </a:p>
+          <a:p>
+            <a:pPr>
+              <a:spcAft>
+                <a:spcPts val="900"/>
+              </a:spcAft>
+            </a:pPr>
+            <a:r>
+              <a:rPr sz="1700" b="1">
+                <a:solidFill>
+                  <a:srgbClr val="B23A26"/>
+                </a:solidFill>
+                <a:latin typeface="Cambria"/>
+              </a:rPr>
+              <a:t>Runs end to end locally under Docker with an AWS emulator; a single scripted Terraform step provisions this same pipeline on AWS.</a:t>
+            </a:r>
+          </a:p>
+        </p:txBody>
+      </p:sp>
+      <p:sp>
+        <p:nvSpPr>
+          <p:cNvPr id="4" name="Rectangle 3"/>
+          <p:cNvSpPr/>
+          <p:nvPr/>
+        </p:nvSpPr>
+        <p:spPr>
+          <a:xfrm>
+            <a:off x="658368" y="1261872"/>
+            <a:ext cx="3108960" cy="36576"/>
           </a:xfrm>
           <a:prstGeom prst="rect">
             <a:avLst/>
@@ -3620,7 +3898,7 @@
 </p:sld>
 </file>
 
-<file path=ppt/slides/slide3.xml><?xml version="1.0" encoding="utf-8"?>
+<file path=ppt/slides/slide4.xml><?xml version="1.0" encoding="utf-8"?>
 <p:sld xmlns:a="http://schemas.openxmlformats.org/drawingml/2006/main" xmlns:p="http://schemas.openxmlformats.org/presentationml/2006/main" xmlns:r="http://schemas.openxmlformats.org/officeDocument/2006/relationships">
   <p:cSld>
     <p:spTree>
@@ -3632,18 +3910,64 @@
       <p:grpSpPr/>
       <p:sp>
         <p:nvSpPr>
-          <p:cNvPr id="2" name="Title 1"/>
-          <p:cNvSpPr>
-            <a:spLocks noGrp="1"/>
-          </p:cNvSpPr>
-          <p:nvPr>
-            <p:ph type="title"/>
-          </p:nvPr>
+          <p:cNvPr id="5" name="Rounded Rectangle 4"/>
+          <p:cNvSpPr/>
+          <p:nvPr/>
         </p:nvSpPr>
         <p:spPr>
           <a:xfrm>
-            <a:off x="640080" y="411480"/>
-            <a:ext cx="10972800" cy="822960"/>
+            <a:off x="548640" y="1463040"/>
+            <a:ext cx="11091672" cy="5029200"/>
+          </a:xfrm>
+          <a:prstGeom prst="roundRect">
+            <a:avLst/>
+          </a:prstGeom>
+          <a:solidFill>
+            <a:srgbClr val="F5E7E4"/>
+          </a:solidFill>
+          <a:ln w="12700">
+            <a:solidFill>
+              <a:srgbClr val="B23A26"/>
+            </a:solidFill>
+          </a:ln>
+          <a:effectLst/>
+        </p:spPr>
+        <p:style>
+          <a:lnRef idx="1">
+            <a:schemeClr val="accent1"/>
+          </a:lnRef>
+          <a:fillRef idx="3">
+            <a:schemeClr val="accent1"/>
+          </a:fillRef>
+          <a:effectRef idx="2">
+            <a:schemeClr val="accent1"/>
+          </a:effectRef>
+          <a:fontRef idx="minor">
+            <a:schemeClr val="lt1"/>
+          </a:fontRef>
+        </p:style>
+        <p:txBody>
+          <a:bodyPr rtlCol="0" anchor="ctr"/>
+          <a:lstStyle/>
+          <a:p>
+            <a:pPr algn="ctr"/>
+          </a:p>
+        </p:txBody>
+      </p:sp>
+      <p:sp>
+        <p:nvSpPr>
+          <p:cNvPr id="2" name="Title 1"/>
+          <p:cNvSpPr>
+            <a:spLocks noGrp="1"/>
+          </p:cNvSpPr>
+          <p:nvPr>
+            <p:ph type="title"/>
+          </p:nvPr>
+        </p:nvSpPr>
+        <p:spPr>
+          <a:xfrm>
+            <a:off x="640080" y="384048"/>
+            <a:ext cx="10972800" cy="868680"/>
           </a:xfrm>
         </p:spPr>
         <p:txBody>
@@ -3654,11 +3978,11 @@
             <a:r>
               <a:rPr b="1" sz="2700">
                 <a:solidFill>
-                  <a:srgbClr val="232A26"/>
+                  <a:srgbClr val="B23A26"/>
                 </a:solidFill>
                 <a:latin typeface="Book Antiqua"/>
               </a:rPr>
-              <a:t>How it works: forest edge to cloud</a:t>
+              <a:t>Demonstration: the pipeline end to end</a:t>
             </a:r>
           </a:p>
         </p:txBody>
@@ -3675,8 +3999,8 @@
         </p:nvSpPr>
         <p:spPr>
           <a:xfrm>
-            <a:off x="658368" y="1463040"/>
-            <a:ext cx="10972800" cy="4663440"/>
+            <a:off x="914400" y="1737360"/>
+            <a:ext cx="5349240" cy="4526280"/>
           </a:xfrm>
         </p:spPr>
         <p:txBody>
@@ -3687,113 +4011,65 @@
           <a:p>
             <a:pPr>
               <a:spcAft>
-                <a:spcPts val="900"/>
+                <a:spcPts val="800"/>
               </a:spcAft>
             </a:pPr>
             <a:r>
-              <a:rPr sz="1700" b="0">
+              <a:rPr sz="1500" b="0">
                 <a:solidFill>
                   <a:srgbClr val="232A26"/>
                 </a:solidFill>
                 <a:latin typeface="Cambria"/>
               </a:rPr>
-              <a:t>Field sensors: ten containerised sensors stream temperature, humidity, smoke, wind and soil moisture from two stations.</a:t>
+              <a:t>Dashboard captured from the local end-to-end run (Docker plus AWS emulator).</a:t>
             </a:r>
           </a:p>
           <a:p>
             <a:pPr>
               <a:spcAft>
-                <a:spcPts val="900"/>
+                <a:spcPts val="800"/>
               </a:spcAft>
             </a:pPr>
             <a:r>
-              <a:rPr sz="1700" b="0">
+              <a:rPr sz="1500" b="0">
                 <a:solidFill>
                   <a:srgbClr val="232A26"/>
                 </a:solidFill>
                 <a:latin typeface="Cambria"/>
               </a:rPr>
-              <a:t>Fog node, edge gateway: buffers readings, aggregates each time window, and raises fire alerts right at the edge.</a:t>
+              <a:t>95 automated tests, all passing across the sensors, fog node, queue consumer and dashboard modules.</a:t>
             </a:r>
           </a:p>
           <a:p>
             <a:pPr>
               <a:spcAft>
-                <a:spcPts val="900"/>
+                <a:spcPts val="800"/>
               </a:spcAft>
             </a:pPr>
             <a:r>
-              <a:rPr sz="1700" b="0">
+              <a:rPr sz="1500" b="0">
                 <a:solidFill>
                   <a:srgbClr val="232A26"/>
                 </a:solidFill>
                 <a:latin typeface="Cambria"/>
               </a:rPr>
-              <a:t>Message queue: Amazon SQS receives each window's aggregates in batched sends.</a:t>
+              <a:t>Every pipeline health check green: a scripted check verifies sensors to fog to queue to ingest to store live, end to end.</a:t>
             </a:r>
           </a:p>
           <a:p>
             <a:pPr>
               <a:spcAft>
-                <a:spcPts val="900"/>
+                <a:spcPts val="800"/>
               </a:spcAft>
             </a:pPr>
             <a:r>
-              <a:rPr sz="1700" b="0">
-                <a:solidFill>
-                  <a:srgbClr val="232A26"/>
+              <a:rPr sz="1500" b="1">
+                <a:solidFill>
+                  <a:srgbClr val="B23A26"/>
                 </a:solidFill>
                 <a:latin typeface="Cambria"/>
               </a:rPr>
-              <a:t>Serverless ingest: an AWS Lambda function consumes the queue and transforms every record.</a:t>
-            </a:r>
-          </a:p>
-          <a:p>
-            <a:pPr>
-              <a:spcAft>
-                <a:spcPts val="900"/>
-              </a:spcAft>
-            </a:pPr>
-            <a:r>
-              <a:rPr sz="1700" b="0">
-                <a:solidFill>
-                  <a:srgbClr val="232A26"/>
-                </a:solidFill>
-                <a:latin typeface="Cambria"/>
-              </a:rPr>
-              <a:t>Cloud store: Amazon DynamoDB keeps the full history of aggregate windows.</a:t>
-            </a:r>
-          </a:p>
-          <a:p>
-            <a:pPr>
-              <a:spcAft>
-                <a:spcPts val="900"/>
-              </a:spcAft>
-            </a:pPr>
-            <a:r>
-              <a:rPr sz="1700" b="0">
-                <a:solidFill>
-                  <a:srgbClr val="232A26"/>
-                </a:solidFill>
-                <a:latin typeface="Cambria"/>
-              </a:rPr>
-              <a:t>Live dashboard: Amazon API Gateway serves the data; the page itself is hosted on Amazon S3, with a 0 to 4 fire-risk dial per station.</a:t>
-            </a:r>
-          </a:p>
-          <a:p>
-            <a:pPr>
-              <a:spcAft>
-                <a:spcPts val="900"/>
-              </a:spcAft>
-            </a:pPr>
-            <a:r>
-              <a:rPr sz="1700" b="1">
-                <a:solidFill>
-                  <a:srgbClr val="B23A26"/>
-                </a:solidFill>
-                <a:latin typeface="Cambria"/>
-              </a:rPr>
-              <a:t>Runs end to end locally under Docker with an AWS emulator; a single scripted Terraform step provisions this same pipeline on AWS.</a:t>
+              <a:t>2,000-message burst absorbed: 32 parallel senders flood the queue; the serverless consumer keeps draining it without stalling.</a:t>
             </a:r>
           </a:p>
         </p:txBody>
@@ -3806,8 +4082,8 @@
         </p:nvSpPr>
         <p:spPr>
           <a:xfrm>
-            <a:off x="658368" y="1207008"/>
-            <a:ext cx="10881360" cy="45720"/>
+            <a:off x="658368" y="1261872"/>
+            <a:ext cx="3108960" cy="36576"/>
           </a:xfrm>
           <a:prstGeom prst="rect">
             <a:avLst/>
@@ -3842,16 +4118,256 @@
           </a:p>
         </p:txBody>
       </p:sp>
-      <p:sp>
-        <p:nvSpPr>
-          <p:cNvPr id="5" name="Rectangle 4"/>
+      <p:pic>
+        <p:nvPicPr>
+          <p:cNvPr id="6" name="Picture 5" descr="dashboard-desktop.png"/>
+          <p:cNvPicPr>
+            <a:picLocks noChangeAspect="1"/>
+          </p:cNvPicPr>
+          <p:nvPr/>
+        </p:nvPicPr>
+        <p:blipFill>
+          <a:blip r:embed="rId2"/>
+          <a:stretch>
+            <a:fillRect/>
+          </a:stretch>
+        </p:blipFill>
+        <p:spPr>
+          <a:xfrm>
+            <a:off x="6492240" y="2228135"/>
+            <a:ext cx="4846320" cy="3407568"/>
+          </a:xfrm>
+          <a:prstGeom prst="rect">
+            <a:avLst/>
+          </a:prstGeom>
+        </p:spPr>
+      </p:pic>
+    </p:spTree>
+  </p:cSld>
+  <p:clrMapOvr>
+    <a:masterClrMapping/>
+  </p:clrMapOvr>
+</p:sld>
+</file>
+
+<file path=ppt/slides/slide5.xml><?xml version="1.0" encoding="utf-8"?>
+<p:sld xmlns:a="http://schemas.openxmlformats.org/drawingml/2006/main" xmlns:p="http://schemas.openxmlformats.org/presentationml/2006/main" xmlns:r="http://schemas.openxmlformats.org/officeDocument/2006/relationships">
+  <p:cSld>
+    <p:spTree>
+      <p:nvGrpSpPr>
+        <p:cNvPr id="1" name=""/>
+        <p:cNvGrpSpPr/>
+        <p:nvPr/>
+      </p:nvGrpSpPr>
+      <p:grpSpPr/>
+      <p:sp>
+        <p:nvSpPr>
+          <p:cNvPr id="5" name="Rounded Rectangle 4"/>
           <p:cNvSpPr/>
           <p:nvPr/>
         </p:nvSpPr>
         <p:spPr>
           <a:xfrm>
-            <a:off x="658368" y="6355080"/>
-            <a:ext cx="2743200" cy="36576"/>
+            <a:off x="548640" y="1463040"/>
+            <a:ext cx="11091672" cy="5029200"/>
+          </a:xfrm>
+          <a:prstGeom prst="roundRect">
+            <a:avLst/>
+          </a:prstGeom>
+          <a:solidFill>
+            <a:srgbClr val="F5E7E4"/>
+          </a:solidFill>
+          <a:ln w="12700">
+            <a:solidFill>
+              <a:srgbClr val="B23A26"/>
+            </a:solidFill>
+          </a:ln>
+          <a:effectLst/>
+        </p:spPr>
+        <p:style>
+          <a:lnRef idx="1">
+            <a:schemeClr val="accent1"/>
+          </a:lnRef>
+          <a:fillRef idx="3">
+            <a:schemeClr val="accent1"/>
+          </a:fillRef>
+          <a:effectRef idx="2">
+            <a:schemeClr val="accent1"/>
+          </a:effectRef>
+          <a:fontRef idx="minor">
+            <a:schemeClr val="lt1"/>
+          </a:fontRef>
+        </p:style>
+        <p:txBody>
+          <a:bodyPr rtlCol="0" anchor="ctr"/>
+          <a:lstStyle/>
+          <a:p>
+            <a:pPr algn="ctr"/>
+          </a:p>
+        </p:txBody>
+      </p:sp>
+      <p:sp>
+        <p:nvSpPr>
+          <p:cNvPr id="2" name="Title 1"/>
+          <p:cNvSpPr>
+            <a:spLocks noGrp="1"/>
+          </p:cNvSpPr>
+          <p:nvPr>
+            <p:ph type="title"/>
+          </p:nvPr>
+        </p:nvSpPr>
+        <p:spPr>
+          <a:xfrm>
+            <a:off x="640080" y="384048"/>
+            <a:ext cx="10972800" cy="868680"/>
+          </a:xfrm>
+        </p:spPr>
+        <p:txBody>
+          <a:bodyPr wrap="square" anchor="t"/>
+          <a:lstStyle/>
+          <a:p>
+            <a:pPr algn="l"/>
+            <a:r>
+              <a:rPr b="1" sz="2700">
+                <a:solidFill>
+                  <a:srgbClr val="B23A26"/>
+                </a:solidFill>
+                <a:latin typeface="Book Antiqua"/>
+              </a:rPr>
+              <a:t>The hardest part: an invisible bug</a:t>
+            </a:r>
+          </a:p>
+        </p:txBody>
+      </p:sp>
+      <p:sp>
+        <p:nvSpPr>
+          <p:cNvPr id="3" name="Content Placeholder 2"/>
+          <p:cNvSpPr>
+            <a:spLocks noGrp="1"/>
+          </p:cNvSpPr>
+          <p:nvPr>
+            <p:ph idx="1"/>
+          </p:nvPr>
+        </p:nvSpPr>
+        <p:spPr>
+          <a:xfrm>
+            <a:off x="914400" y="1737360"/>
+            <a:ext cx="10424160" cy="4480560"/>
+          </a:xfrm>
+        </p:spPr>
+        <p:txBody>
+          <a:bodyPr wrap="square">
+            <a:normAutofit/>
+          </a:bodyPr>
+          <a:lstStyle/>
+          <a:p>
+            <a:pPr>
+              <a:spcAft>
+                <a:spcPts val="900"/>
+              </a:spcAft>
+            </a:pPr>
+            <a:r>
+              <a:rPr sz="1700" b="1">
+                <a:solidFill>
+                  <a:srgbClr val="B23A26"/>
+                </a:solidFill>
+                <a:latin typeface="Cambria"/>
+              </a:rPr>
+              <a:t>The problem</a:t>
+            </a:r>
+          </a:p>
+          <a:p>
+            <a:pPr lvl="1">
+              <a:spcAft>
+                <a:spcPts val="900"/>
+              </a:spcAft>
+            </a:pPr>
+            <a:r>
+              <a:rPr sz="1500" b="0">
+                <a:solidFill>
+                  <a:srgbClr val="232A26"/>
+                </a:solidFill>
+                <a:latin typeface="Cambria"/>
+              </a:rPr>
+              <a:t>Locally, the pipeline signs its queue and database calls with the emulator's dummy credentials. The code decided when to use them by checking whether an AWS access-key variable was present.</a:t>
+            </a:r>
+          </a:p>
+          <a:p>
+            <a:pPr>
+              <a:spcAft>
+                <a:spcPts val="900"/>
+              </a:spcAft>
+            </a:pPr>
+            <a:r>
+              <a:rPr sz="1700" b="1">
+                <a:solidFill>
+                  <a:srgbClr val="B23A26"/>
+                </a:solidFill>
+                <a:latin typeface="Cambria"/>
+              </a:rPr>
+              <a:t>Why it was hard</a:t>
+            </a:r>
+          </a:p>
+          <a:p>
+            <a:pPr lvl="1">
+              <a:spcAft>
+                <a:spcPts val="900"/>
+              </a:spcAft>
+            </a:pPr>
+            <a:r>
+              <a:rPr sz="1500" b="0">
+                <a:solidFill>
+                  <a:srgbClr val="232A26"/>
+                </a:solidFill>
+                <a:latin typeface="Cambria"/>
+              </a:rPr>
+              <a:t>Real AWS injects that exact variable into every function it runs, so in production, every queue and database call would be signed with incomplete credentials and rejected. All 95 tests stayed green; nothing could fail until the first real deployment.</a:t>
+            </a:r>
+          </a:p>
+          <a:p>
+            <a:pPr>
+              <a:spcAft>
+                <a:spcPts val="900"/>
+              </a:spcAft>
+            </a:pPr>
+            <a:r>
+              <a:rPr sz="1700" b="1">
+                <a:solidFill>
+                  <a:srgbClr val="B23A26"/>
+                </a:solidFill>
+                <a:latin typeface="Cambria"/>
+              </a:rPr>
+              <a:t>The fix</a:t>
+            </a:r>
+          </a:p>
+          <a:p>
+            <a:pPr lvl="1">
+              <a:spcAft>
+                <a:spcPts val="900"/>
+              </a:spcAft>
+            </a:pPr>
+            <a:r>
+              <a:rPr sz="1500" b="0">
+                <a:solidFill>
+                  <a:srgbClr val="232A26"/>
+                </a:solidFill>
+                <a:latin typeface="Cambria"/>
+              </a:rPr>
+              <a:t>Gate on a signal that only exists locally: the emulator's endpoint address. On real AWS it is absent, so the platform's own credentials take over automatically, and new tests now pin that behaviour down in both profiles.</a:t>
+            </a:r>
+          </a:p>
+        </p:txBody>
+      </p:sp>
+      <p:sp>
+        <p:nvSpPr>
+          <p:cNvPr id="4" name="Rectangle 3"/>
+          <p:cNvSpPr/>
+          <p:nvPr/>
+        </p:nvSpPr>
+        <p:spPr>
+          <a:xfrm>
+            <a:off x="658368" y="1261872"/>
+            <a:ext cx="3108960" cy="36576"/>
           </a:xfrm>
           <a:prstGeom prst="rect">
             <a:avLst/>
@@ -3894,7 +4410,7 @@
 </p:sld>
 </file>
 
-<file path=ppt/slides/slide4.xml><?xml version="1.0" encoding="utf-8"?>
+<file path=ppt/slides/slide6.xml><?xml version="1.0" encoding="utf-8"?>
 <p:sld xmlns:a="http://schemas.openxmlformats.org/drawingml/2006/main" xmlns:p="http://schemas.openxmlformats.org/presentationml/2006/main" xmlns:r="http://schemas.openxmlformats.org/officeDocument/2006/relationships">
   <p:cSld>
     <p:spTree>
@@ -3906,143 +4422,25 @@
       <p:grpSpPr/>
       <p:sp>
         <p:nvSpPr>
-          <p:cNvPr id="2" name="Title 1"/>
-          <p:cNvSpPr>
-            <a:spLocks noGrp="1"/>
-          </p:cNvSpPr>
-          <p:nvPr>
-            <p:ph type="title"/>
-          </p:nvPr>
+          <p:cNvPr id="5" name="Rounded Rectangle 4"/>
+          <p:cNvSpPr/>
+          <p:nvPr/>
         </p:nvSpPr>
         <p:spPr>
           <a:xfrm>
-            <a:off x="640080" y="411480"/>
-            <a:ext cx="10972800" cy="822960"/>
+            <a:off x="548640" y="1463040"/>
+            <a:ext cx="11091672" cy="5029200"/>
           </a:xfrm>
-        </p:spPr>
-        <p:txBody>
-          <a:bodyPr wrap="square" anchor="t"/>
-          <a:lstStyle/>
-          <a:p>
-            <a:pPr algn="l"/>
-            <a:r>
-              <a:rPr b="1" sz="2700">
-                <a:solidFill>
-                  <a:srgbClr val="232A26"/>
-                </a:solidFill>
-                <a:latin typeface="Book Antiqua"/>
-              </a:rPr>
-              <a:t>Demonstration: the pipeline end to end</a:t>
-            </a:r>
-          </a:p>
-        </p:txBody>
-      </p:sp>
-      <p:sp>
-        <p:nvSpPr>
-          <p:cNvPr id="3" name="Content Placeholder 2"/>
-          <p:cNvSpPr>
-            <a:spLocks noGrp="1"/>
-          </p:cNvSpPr>
-          <p:nvPr>
-            <p:ph idx="1"/>
-          </p:nvPr>
-        </p:nvSpPr>
-        <p:spPr>
-          <a:xfrm>
-            <a:off x="658368" y="1463040"/>
-            <a:ext cx="5760720" cy="4663440"/>
-          </a:xfrm>
-        </p:spPr>
-        <p:txBody>
-          <a:bodyPr wrap="square">
-            <a:normAutofit/>
-          </a:bodyPr>
-          <a:lstStyle/>
-          <a:p>
-            <a:pPr>
-              <a:spcAft>
-                <a:spcPts val="800"/>
-              </a:spcAft>
-            </a:pPr>
-            <a:r>
-              <a:rPr sz="1500" b="0">
-                <a:solidFill>
-                  <a:srgbClr val="232A26"/>
-                </a:solidFill>
-                <a:latin typeface="Cambria"/>
-              </a:rPr>
-              <a:t>Dashboard captured from the local end-to-end run (Docker plus AWS emulator).</a:t>
-            </a:r>
-          </a:p>
-          <a:p>
-            <a:pPr>
-              <a:spcAft>
-                <a:spcPts val="800"/>
-              </a:spcAft>
-            </a:pPr>
-            <a:r>
-              <a:rPr sz="1500" b="0">
-                <a:solidFill>
-                  <a:srgbClr val="232A26"/>
-                </a:solidFill>
-                <a:latin typeface="Cambria"/>
-              </a:rPr>
-              <a:t>95 automated tests, all passing across the sensors, fog node, queue consumer and dashboard modules.</a:t>
-            </a:r>
-          </a:p>
-          <a:p>
-            <a:pPr>
-              <a:spcAft>
-                <a:spcPts val="800"/>
-              </a:spcAft>
-            </a:pPr>
-            <a:r>
-              <a:rPr sz="1500" b="0">
-                <a:solidFill>
-                  <a:srgbClr val="232A26"/>
-                </a:solidFill>
-                <a:latin typeface="Cambria"/>
-              </a:rPr>
-              <a:t>Every pipeline health check green: a scripted check verifies sensors to fog to queue to ingest to store live, end to end.</a:t>
-            </a:r>
-          </a:p>
-          <a:p>
-            <a:pPr>
-              <a:spcAft>
-                <a:spcPts val="800"/>
-              </a:spcAft>
-            </a:pPr>
-            <a:r>
-              <a:rPr sz="1500" b="1">
-                <a:solidFill>
-                  <a:srgbClr val="B23A26"/>
-                </a:solidFill>
-                <a:latin typeface="Cambria"/>
-              </a:rPr>
-              <a:t>2,000-message burst absorbed: 32 parallel senders flood the queue; the serverless consumer keeps draining it without stalling.</a:t>
-            </a:r>
-          </a:p>
-        </p:txBody>
-      </p:sp>
-      <p:sp>
-        <p:nvSpPr>
-          <p:cNvPr id="4" name="Rectangle 3"/>
-          <p:cNvSpPr/>
-          <p:nvPr/>
-        </p:nvSpPr>
-        <p:spPr>
-          <a:xfrm>
-            <a:off x="658368" y="1207008"/>
-            <a:ext cx="10881360" cy="45720"/>
-          </a:xfrm>
-          <a:prstGeom prst="rect">
+          <a:prstGeom prst="roundRect">
             <a:avLst/>
           </a:prstGeom>
           <a:solidFill>
-            <a:srgbClr val="B23A26"/>
+            <a:srgbClr val="F5E7E4"/>
           </a:solidFill>
-          <a:ln>
-            <a:noFill/>
+          <a:ln w="12700">
+            <a:solidFill>
+              <a:srgbClr val="B23A26"/>
+            </a:solidFill>
           </a:ln>
           <a:effectLst/>
         </p:spPr>
@@ -4068,139 +4466,53 @@
           </a:p>
         </p:txBody>
       </p:sp>
-      <p:pic>
-        <p:nvPicPr>
-          <p:cNvPr id="5" name="Picture 4" descr="dashboard-desktop.png"/>
-          <p:cNvPicPr>
-            <a:picLocks noChangeAspect="1"/>
-          </p:cNvPicPr>
-          <p:nvPr/>
-        </p:nvPicPr>
-        <p:blipFill>
-          <a:blip r:embed="rId2"/>
-          <a:stretch>
-            <a:fillRect/>
-          </a:stretch>
-        </p:blipFill>
+      <p:sp>
+        <p:nvSpPr>
+          <p:cNvPr id="2" name="Title 1"/>
+          <p:cNvSpPr>
+            <a:spLocks noGrp="1"/>
+          </p:cNvSpPr>
+          <p:nvPr>
+            <p:ph type="title"/>
+          </p:nvPr>
+        </p:nvSpPr>
         <p:spPr>
           <a:xfrm>
-            <a:off x="6629400" y="1939671"/>
-            <a:ext cx="5120640" cy="3600449"/>
+            <a:off x="640080" y="384048"/>
+            <a:ext cx="10972800" cy="868680"/>
           </a:xfrm>
-          <a:prstGeom prst="rect">
-            <a:avLst/>
-          </a:prstGeom>
         </p:spPr>
-      </p:pic>
-      <p:sp>
-        <p:nvSpPr>
-          <p:cNvPr id="6" name="Rectangle 5"/>
-          <p:cNvSpPr/>
-          <p:nvPr/>
+        <p:txBody>
+          <a:bodyPr wrap="square" anchor="t"/>
+          <a:lstStyle/>
+          <a:p>
+            <a:pPr algn="l"/>
+            <a:r>
+              <a:rPr b="1" sz="2700">
+                <a:solidFill>
+                  <a:srgbClr val="B23A26"/>
+                </a:solidFill>
+                <a:latin typeface="Book Antiqua"/>
+              </a:rPr>
+              <a:t>What this project shows</a:t>
+            </a:r>
+          </a:p>
+        </p:txBody>
+      </p:sp>
+      <p:sp>
+        <p:nvSpPr>
+          <p:cNvPr id="3" name="Content Placeholder 2"/>
+          <p:cNvSpPr>
+            <a:spLocks noGrp="1"/>
+          </p:cNvSpPr>
+          <p:nvPr>
+            <p:ph idx="1"/>
+          </p:nvPr>
         </p:nvSpPr>
         <p:spPr>
           <a:xfrm>
-            <a:off x="658368" y="6355080"/>
-            <a:ext cx="2743200" cy="36576"/>
-          </a:xfrm>
-          <a:prstGeom prst="rect">
-            <a:avLst/>
-          </a:prstGeom>
-          <a:solidFill>
-            <a:srgbClr val="B23A26"/>
-          </a:solidFill>
-          <a:ln>
-            <a:noFill/>
-          </a:ln>
-          <a:effectLst/>
-        </p:spPr>
-        <p:style>
-          <a:lnRef idx="1">
-            <a:schemeClr val="accent1"/>
-          </a:lnRef>
-          <a:fillRef idx="3">
-            <a:schemeClr val="accent1"/>
-          </a:fillRef>
-          <a:effectRef idx="2">
-            <a:schemeClr val="accent1"/>
-          </a:effectRef>
-          <a:fontRef idx="minor">
-            <a:schemeClr val="lt1"/>
-          </a:fontRef>
-        </p:style>
-        <p:txBody>
-          <a:bodyPr rtlCol="0" anchor="ctr"/>
-          <a:lstStyle/>
-          <a:p>
-            <a:pPr algn="ctr"/>
-          </a:p>
-        </p:txBody>
-      </p:sp>
-    </p:spTree>
-  </p:cSld>
-  <p:clrMapOvr>
-    <a:masterClrMapping/>
-  </p:clrMapOvr>
-</p:sld>
-</file>
-
-<file path=ppt/slides/slide5.xml><?xml version="1.0" encoding="utf-8"?>
-<p:sld xmlns:a="http://schemas.openxmlformats.org/drawingml/2006/main" xmlns:p="http://schemas.openxmlformats.org/presentationml/2006/main" xmlns:r="http://schemas.openxmlformats.org/officeDocument/2006/relationships">
-  <p:cSld>
-    <p:spTree>
-      <p:nvGrpSpPr>
-        <p:cNvPr id="1" name=""/>
-        <p:cNvGrpSpPr/>
-        <p:nvPr/>
-      </p:nvGrpSpPr>
-      <p:grpSpPr/>
-      <p:sp>
-        <p:nvSpPr>
-          <p:cNvPr id="2" name="Title 1"/>
-          <p:cNvSpPr>
-            <a:spLocks noGrp="1"/>
-          </p:cNvSpPr>
-          <p:nvPr>
-            <p:ph type="title"/>
-          </p:nvPr>
-        </p:nvSpPr>
-        <p:spPr>
-          <a:xfrm>
-            <a:off x="640080" y="411480"/>
-            <a:ext cx="10972800" cy="822960"/>
-          </a:xfrm>
-        </p:spPr>
-        <p:txBody>
-          <a:bodyPr wrap="square" anchor="t"/>
-          <a:lstStyle/>
-          <a:p>
-            <a:pPr algn="l"/>
-            <a:r>
-              <a:rPr b="1" sz="2700">
-                <a:solidFill>
-                  <a:srgbClr val="232A26"/>
-                </a:solidFill>
-                <a:latin typeface="Book Antiqua"/>
-              </a:rPr>
-              <a:t>The hardest part: an invisible bug</a:t>
-            </a:r>
-          </a:p>
-        </p:txBody>
-      </p:sp>
-      <p:sp>
-        <p:nvSpPr>
-          <p:cNvPr id="3" name="Content Placeholder 2"/>
-          <p:cNvSpPr>
-            <a:spLocks noGrp="1"/>
-          </p:cNvSpPr>
-          <p:nvPr>
-            <p:ph idx="1"/>
-          </p:nvPr>
-        </p:nvSpPr>
-        <p:spPr>
-          <a:xfrm>
-            <a:off x="658368" y="1463040"/>
-            <a:ext cx="10972800" cy="4663440"/>
+            <a:off x="914400" y="1737360"/>
+            <a:ext cx="10424160" cy="4480560"/>
           </a:xfrm>
         </p:spPr>
         <p:txBody>
@@ -4215,29 +4527,13 @@
               </a:spcAft>
             </a:pPr>
             <a:r>
-              <a:rPr sz="1700" b="1">
-                <a:solidFill>
-                  <a:srgbClr val="B23A26"/>
+              <a:rPr sz="1700" b="0">
+                <a:solidFill>
+                  <a:srgbClr val="232A26"/>
                 </a:solidFill>
                 <a:latin typeface="Cambria"/>
               </a:rPr>
-              <a:t>The problem</a:t>
-            </a:r>
-          </a:p>
-          <a:p>
-            <a:pPr lvl="1">
-              <a:spcAft>
-                <a:spcPts val="900"/>
-              </a:spcAft>
-            </a:pPr>
-            <a:r>
-              <a:rPr sz="1500" b="0">
-                <a:solidFill>
-                  <a:srgbClr val="232A26"/>
-                </a:solidFill>
-                <a:latin typeface="Cambria"/>
-              </a:rPr>
-              <a:t>Locally, the pipeline signs its queue and database calls with the emulator's dummy credentials. The code decided when to use them by checking whether an AWS access-key variable was present.</a:t>
+              <a:t>Decisions at the edge: windows, aggregation and fire alerts run beside the sensors, so warnings never wait on the cloud.</a:t>
             </a:r>
           </a:p>
           <a:p>
@@ -4247,29 +4543,13 @@
               </a:spcAft>
             </a:pPr>
             <a:r>
-              <a:rPr sz="1700" b="1">
-                <a:solidFill>
-                  <a:srgbClr val="B23A26"/>
+              <a:rPr sz="1700" b="0">
+                <a:solidFill>
+                  <a:srgbClr val="232A26"/>
                 </a:solidFill>
                 <a:latin typeface="Cambria"/>
               </a:rPr>
-              <a:t>Why it was hard</a:t>
-            </a:r>
-          </a:p>
-          <a:p>
-            <a:pPr lvl="1">
-              <a:spcAft>
-                <a:spcPts val="900"/>
-              </a:spcAft>
-            </a:pPr>
-            <a:r>
-              <a:rPr sz="1500" b="0">
-                <a:solidFill>
-                  <a:srgbClr val="232A26"/>
-                </a:solidFill>
-                <a:latin typeface="Cambria"/>
-              </a:rPr>
-              <a:t>Real AWS injects that exact variable into every function it runs, so in production, every queue and database call would be signed with incomplete credentials and rejected. All 95 tests stayed green; nothing could fail until the first real deployment.</a:t>
+              <a:t>A serverless cloud tier: queue, function, database and dashboard, load-tested with a 2,000-message burst.</a:t>
             </a:r>
           </a:p>
           <a:p>
@@ -4279,193 +4559,15 @@
               </a:spcAft>
             </a:pPr>
             <a:r>
-              <a:rPr sz="1700" b="1">
-                <a:solidFill>
-                  <a:srgbClr val="B23A26"/>
+              <a:rPr sz="1700" b="0">
+                <a:solidFill>
+                  <a:srgbClr val="232A26"/>
                 </a:solidFill>
                 <a:latin typeface="Cambria"/>
               </a:rPr>
-              <a:t>The fix</a:t>
-            </a:r>
-          </a:p>
-          <a:p>
-            <a:pPr lvl="1">
-              <a:spcAft>
-                <a:spcPts val="900"/>
-              </a:spcAft>
-            </a:pPr>
-            <a:r>
-              <a:rPr sz="1500" b="0">
-                <a:solidFill>
-                  <a:srgbClr val="232A26"/>
-                </a:solidFill>
-                <a:latin typeface="Cambria"/>
-              </a:rPr>
-              <a:t>Gate on a signal that only exists locally: the emulator's endpoint address. On real AWS it is absent, so the platform's own credentials take over automatically, and new tests now pin that behaviour down in both profiles.</a:t>
-            </a:r>
-          </a:p>
-        </p:txBody>
-      </p:sp>
-      <p:sp>
-        <p:nvSpPr>
-          <p:cNvPr id="4" name="Rectangle 3"/>
-          <p:cNvSpPr/>
-          <p:nvPr/>
-        </p:nvSpPr>
-        <p:spPr>
-          <a:xfrm>
-            <a:off x="658368" y="1207008"/>
-            <a:ext cx="10881360" cy="45720"/>
-          </a:xfrm>
-          <a:prstGeom prst="rect">
-            <a:avLst/>
-          </a:prstGeom>
-          <a:solidFill>
-            <a:srgbClr val="B23A26"/>
-          </a:solidFill>
-          <a:ln>
-            <a:noFill/>
-          </a:ln>
-          <a:effectLst/>
-        </p:spPr>
-        <p:style>
-          <a:lnRef idx="1">
-            <a:schemeClr val="accent1"/>
-          </a:lnRef>
-          <a:fillRef idx="3">
-            <a:schemeClr val="accent1"/>
-          </a:fillRef>
-          <a:effectRef idx="2">
-            <a:schemeClr val="accent1"/>
-          </a:effectRef>
-          <a:fontRef idx="minor">
-            <a:schemeClr val="lt1"/>
-          </a:fontRef>
-        </p:style>
-        <p:txBody>
-          <a:bodyPr rtlCol="0" anchor="ctr"/>
-          <a:lstStyle/>
-          <a:p>
-            <a:pPr algn="ctr"/>
-          </a:p>
-        </p:txBody>
-      </p:sp>
-      <p:sp>
-        <p:nvSpPr>
-          <p:cNvPr id="5" name="Rectangle 4"/>
-          <p:cNvSpPr/>
-          <p:nvPr/>
-        </p:nvSpPr>
-        <p:spPr>
-          <a:xfrm>
-            <a:off x="658368" y="6355080"/>
-            <a:ext cx="2743200" cy="36576"/>
-          </a:xfrm>
-          <a:prstGeom prst="rect">
-            <a:avLst/>
-          </a:prstGeom>
-          <a:solidFill>
-            <a:srgbClr val="B23A26"/>
-          </a:solidFill>
-          <a:ln>
-            <a:noFill/>
-          </a:ln>
-          <a:effectLst/>
-        </p:spPr>
-        <p:style>
-          <a:lnRef idx="1">
-            <a:schemeClr val="accent1"/>
-          </a:lnRef>
-          <a:fillRef idx="3">
-            <a:schemeClr val="accent1"/>
-          </a:fillRef>
-          <a:effectRef idx="2">
-            <a:schemeClr val="accent1"/>
-          </a:effectRef>
-          <a:fontRef idx="minor">
-            <a:schemeClr val="lt1"/>
-          </a:fontRef>
-        </p:style>
-        <p:txBody>
-          <a:bodyPr rtlCol="0" anchor="ctr"/>
-          <a:lstStyle/>
-          <a:p>
-            <a:pPr algn="ctr"/>
-          </a:p>
-        </p:txBody>
-      </p:sp>
-    </p:spTree>
-  </p:cSld>
-  <p:clrMapOvr>
-    <a:masterClrMapping/>
-  </p:clrMapOvr>
-</p:sld>
-</file>
-
-<file path=ppt/slides/slide6.xml><?xml version="1.0" encoding="utf-8"?>
-<p:sld xmlns:a="http://schemas.openxmlformats.org/drawingml/2006/main" xmlns:p="http://schemas.openxmlformats.org/presentationml/2006/main" xmlns:r="http://schemas.openxmlformats.org/officeDocument/2006/relationships">
-  <p:cSld>
-    <p:spTree>
-      <p:nvGrpSpPr>
-        <p:cNvPr id="1" name=""/>
-        <p:cNvGrpSpPr/>
-        <p:nvPr/>
-      </p:nvGrpSpPr>
-      <p:grpSpPr/>
-      <p:sp>
-        <p:nvSpPr>
-          <p:cNvPr id="2" name="Title 1"/>
-          <p:cNvSpPr>
-            <a:spLocks noGrp="1"/>
-          </p:cNvSpPr>
-          <p:nvPr>
-            <p:ph type="title"/>
-          </p:nvPr>
-        </p:nvSpPr>
-        <p:spPr>
-          <a:xfrm>
-            <a:off x="640080" y="411480"/>
-            <a:ext cx="10972800" cy="822960"/>
-          </a:xfrm>
-        </p:spPr>
-        <p:txBody>
-          <a:bodyPr wrap="square" anchor="t"/>
-          <a:lstStyle/>
-          <a:p>
-            <a:pPr algn="l"/>
-            <a:r>
-              <a:rPr b="1" sz="2700">
-                <a:solidFill>
-                  <a:srgbClr val="232A26"/>
-                </a:solidFill>
-                <a:latin typeface="Book Antiqua"/>
-              </a:rPr>
-              <a:t>What this project shows</a:t>
-            </a:r>
-          </a:p>
-        </p:txBody>
-      </p:sp>
-      <p:sp>
-        <p:nvSpPr>
-          <p:cNvPr id="3" name="Content Placeholder 2"/>
-          <p:cNvSpPr>
-            <a:spLocks noGrp="1"/>
-          </p:cNvSpPr>
-          <p:nvPr>
-            <p:ph idx="1"/>
-          </p:nvPr>
-        </p:nvSpPr>
-        <p:spPr>
-          <a:xfrm>
-            <a:off x="658368" y="1463040"/>
-            <a:ext cx="10972800" cy="4663440"/>
-          </a:xfrm>
-        </p:spPr>
-        <p:txBody>
-          <a:bodyPr wrap="square">
-            <a:normAutofit/>
-          </a:bodyPr>
-          <a:lstStyle/>
+              <a:t>Cloud-ready by design: one scripted Terraform step provisions the identical pipeline on AWS.</a:t>
+            </a:r>
+          </a:p>
           <a:p>
             <a:pPr>
               <a:spcAft>
@@ -4473,54 +4575,6 @@
               </a:spcAft>
             </a:pPr>
             <a:r>
-              <a:rPr sz="1700" b="0">
-                <a:solidFill>
-                  <a:srgbClr val="232A26"/>
-                </a:solidFill>
-                <a:latin typeface="Cambria"/>
-              </a:rPr>
-              <a:t>Decisions at the edge: windows, aggregation and fire alerts run beside the sensors, so warnings never wait on the cloud.</a:t>
-            </a:r>
-          </a:p>
-          <a:p>
-            <a:pPr>
-              <a:spcAft>
-                <a:spcPts val="900"/>
-              </a:spcAft>
-            </a:pPr>
-            <a:r>
-              <a:rPr sz="1700" b="0">
-                <a:solidFill>
-                  <a:srgbClr val="232A26"/>
-                </a:solidFill>
-                <a:latin typeface="Cambria"/>
-              </a:rPr>
-              <a:t>A serverless cloud tier: queue, function, database and dashboard, load-tested with a 2,000-message burst.</a:t>
-            </a:r>
-          </a:p>
-          <a:p>
-            <a:pPr>
-              <a:spcAft>
-                <a:spcPts val="900"/>
-              </a:spcAft>
-            </a:pPr>
-            <a:r>
-              <a:rPr sz="1700" b="0">
-                <a:solidFill>
-                  <a:srgbClr val="232A26"/>
-                </a:solidFill>
-                <a:latin typeface="Cambria"/>
-              </a:rPr>
-              <a:t>Cloud-ready by design: one scripted Terraform step provisions the identical pipeline on AWS.</a:t>
-            </a:r>
-          </a:p>
-          <a:p>
-            <a:pPr>
-              <a:spcAft>
-                <a:spcPts val="900"/>
-              </a:spcAft>
-            </a:pPr>
-            <a:r>
               <a:rPr sz="1700" b="1">
                 <a:solidFill>
                   <a:srgbClr val="B23A26"/>
@@ -4540,52 +4594,8 @@
         </p:nvSpPr>
         <p:spPr>
           <a:xfrm>
-            <a:off x="658368" y="1207008"/>
-            <a:ext cx="10881360" cy="45720"/>
-          </a:xfrm>
-          <a:prstGeom prst="rect">
-            <a:avLst/>
-          </a:prstGeom>
-          <a:solidFill>
-            <a:srgbClr val="B23A26"/>
-          </a:solidFill>
-          <a:ln>
-            <a:noFill/>
-          </a:ln>
-          <a:effectLst/>
-        </p:spPr>
-        <p:style>
-          <a:lnRef idx="1">
-            <a:schemeClr val="accent1"/>
-          </a:lnRef>
-          <a:fillRef idx="3">
-            <a:schemeClr val="accent1"/>
-          </a:fillRef>
-          <a:effectRef idx="2">
-            <a:schemeClr val="accent1"/>
-          </a:effectRef>
-          <a:fontRef idx="minor">
-            <a:schemeClr val="lt1"/>
-          </a:fontRef>
-        </p:style>
-        <p:txBody>
-          <a:bodyPr rtlCol="0" anchor="ctr"/>
-          <a:lstStyle/>
-          <a:p>
-            <a:pPr algn="ctr"/>
-          </a:p>
-        </p:txBody>
-      </p:sp>
-      <p:sp>
-        <p:nvSpPr>
-          <p:cNvPr id="5" name="Rectangle 4"/>
-          <p:cNvSpPr/>
-          <p:nvPr/>
-        </p:nvSpPr>
-        <p:spPr>
-          <a:xfrm>
-            <a:off x="658368" y="6355080"/>
-            <a:ext cx="2743200" cy="36576"/>
+            <a:off x="658368" y="1261872"/>
+            <a:ext cx="3108960" cy="36576"/>
           </a:xfrm>
           <a:prstGeom prst="rect">
             <a:avLst/>
